--- a/openclaw-gemma-4-local-on-1050ti.pptx
+++ b/openclaw-gemma-4-local-on-1050ti.pptx
@@ -5,7 +5,7 @@
     <p:sldMasterId id="2147483648" r:id="rId1"/>
   </p:sldMasterIdLst>
   <p:notesMasterIdLst>
-    <p:notesMasterId r:id="rId14"/>
+    <p:notesMasterId r:id="rId15"/>
   </p:notesMasterIdLst>
   <p:sldIdLst>
     <p:sldId id="256" r:id="rId2"/>
@@ -19,7 +19,8 @@
     <p:sldId id="264" r:id="rId10"/>
     <p:sldId id="265" r:id="rId11"/>
     <p:sldId id="267" r:id="rId12"/>
-    <p:sldId id="266" r:id="rId13"/>
+    <p:sldId id="269" r:id="rId13"/>
+    <p:sldId id="266" r:id="rId14"/>
   </p:sldIdLst>
   <p:sldSz cx="12192000" cy="6858000"/>
   <p:notesSz cx="6858000" cy="9144000"/>
@@ -118,6 +119,11 @@
       </a:defRPr>
     </a:lvl9pPr>
   </p:defaultTextStyle>
+  <p:extLst>
+    <p:ext uri="{EFAFB233-063F-42B5-8137-9DF3F51BA10A}">
+      <p15:sldGuideLst xmlns:p15="http://schemas.microsoft.com/office/powerpoint/2012/main"/>
+    </p:ext>
+  </p:extLst>
 </p:presentation>
 </file>
 
@@ -3710,7 +3716,7 @@
           <a:p>
             <a:r>
               <a:rPr lang="zh-TW" altLang="zh-TW" dirty="0"/>
-              <a:t>OpenClaw Gemma4 Local on 1050ti</a:t>
+              <a:t>OpenClaw + Gemma 4 (Local on GTX 1050 Ti)</a:t>
             </a:r>
             <a:endParaRPr lang="zh-TW" altLang="en-US" dirty="0"/>
           </a:p>
@@ -4803,7 +4809,6 @@
                     <a:bodyPr/>
                     <a:lstStyle/>
                     <a:p>
-                      <a:pPr/>
                       <a:endParaRPr dirty="0"/>
                     </a:p>
                   </a:txBody>
@@ -5517,7 +5522,7 @@
           <p:cNvPr id="2" name="標題 1">
             <a:extLst>
               <a:ext uri="{FF2B5EF4-FFF2-40B4-BE49-F238E27FC236}">
-                <a16:creationId xmlns:a16="http://schemas.microsoft.com/office/drawing/2014/main" id="{4C34B8E5-381F-01C4-A515-09D17BCF4C67}"/>
+                <a16:creationId xmlns:a16="http://schemas.microsoft.com/office/drawing/2014/main" id="{7A747CA8-BA57-9782-3F13-3AF77FAE41E8}"/>
               </a:ext>
             </a:extLst>
           </p:cNvPr>
@@ -5535,7 +5540,7 @@
           <a:p>
             <a:r>
               <a:rPr lang="en-US" altLang="zh-TW" dirty="0"/>
-              <a:t>References</a:t>
+              <a:t>Summary</a:t>
             </a:r>
             <a:endParaRPr lang="zh-TW" altLang="en-US" dirty="0"/>
           </a:p>
@@ -5546,7 +5551,7 @@
           <p:cNvPr id="3" name="內容版面配置區 2">
             <a:extLst>
               <a:ext uri="{FF2B5EF4-FFF2-40B4-BE49-F238E27FC236}">
-                <a16:creationId xmlns:a16="http://schemas.microsoft.com/office/drawing/2014/main" id="{F3A073B2-D884-07D0-EC56-507C2A95E3A5}"/>
+                <a16:creationId xmlns:a16="http://schemas.microsoft.com/office/drawing/2014/main" id="{AF0A2F0F-AE95-710B-7296-A5CCE8409B2D}"/>
               </a:ext>
             </a:extLst>
           </p:cNvPr>
@@ -5563,91 +5568,22 @@
           <a:lstStyle/>
           <a:p>
             <a:r>
-              <a:rPr lang="en-US" altLang="zh-TW" dirty="0">
-                <a:hlinkClick r:id="rId2"/>
-              </a:rPr>
-              <a:t>OpenClaw </a:t>
-            </a:r>
-            <a:r>
-              <a:rPr lang="en-US" altLang="zh-TW" dirty="0" err="1">
-                <a:hlinkClick r:id="rId2"/>
-              </a:rPr>
-              <a:t>github</a:t>
-            </a:r>
-            <a:r>
-              <a:rPr lang="en-US" altLang="zh-TW" dirty="0">
-                <a:hlinkClick r:id="rId2"/>
-              </a:rPr>
-              <a:t> repo</a:t>
+              <a:rPr lang="zh-TW" altLang="zh-TW" dirty="0"/>
+              <a:t>With the same parameter scale, dense models perform better than MoE models in agent tasks.</a:t>
             </a:r>
             <a:endParaRPr lang="en-US" altLang="zh-TW" dirty="0"/>
           </a:p>
           <a:p>
             <a:r>
-              <a:rPr lang="en-US" altLang="zh-TW" u="sng" dirty="0" err="1">
-                <a:hlinkClick r:id="rId3"/>
-              </a:rPr>
-              <a:t>huggingface</a:t>
-            </a:r>
-            <a:r>
-              <a:rPr lang="en-US" altLang="zh-TW" u="sng" dirty="0">
-                <a:hlinkClick r:id="rId3"/>
-              </a:rPr>
-              <a:t> </a:t>
-            </a:r>
-            <a:r>
-              <a:rPr lang="en-US" altLang="zh-TW" u="sng" dirty="0" err="1">
-                <a:hlinkClick r:id="rId3"/>
-              </a:rPr>
-              <a:t>unsloth</a:t>
-            </a:r>
-            <a:r>
-              <a:rPr lang="en-US" altLang="zh-TW" u="sng" dirty="0">
-                <a:hlinkClick r:id="rId3"/>
-              </a:rPr>
-              <a:t>/gemma-4-E2B-it-GGUF</a:t>
-            </a:r>
-            <a:endParaRPr lang="zh-TW" altLang="zh-TW" dirty="0"/>
-          </a:p>
-          <a:p>
-            <a:r>
-              <a:rPr lang="en-US" altLang="zh-TW" u="sng" dirty="0" err="1">
-                <a:hlinkClick r:id="rId4"/>
-              </a:rPr>
-              <a:t>huggingface</a:t>
-            </a:r>
-            <a:r>
-              <a:rPr lang="en-US" altLang="zh-TW" u="sng" dirty="0">
-                <a:hlinkClick r:id="rId4"/>
-              </a:rPr>
-              <a:t> </a:t>
-            </a:r>
-            <a:r>
-              <a:rPr lang="en-US" altLang="zh-TW" u="sng" dirty="0" err="1">
-                <a:hlinkClick r:id="rId4"/>
-              </a:rPr>
-              <a:t>unsloth</a:t>
-            </a:r>
-            <a:r>
-              <a:rPr lang="en-US" altLang="zh-TW" u="sng" dirty="0">
-                <a:hlinkClick r:id="rId4"/>
-              </a:rPr>
-              <a:t>/gemma-4-E2B-it-GGUF MTP</a:t>
-            </a:r>
-            <a:endParaRPr lang="zh-TW" altLang="zh-TW" dirty="0"/>
-          </a:p>
-          <a:p>
-            <a:r>
-              <a:rPr lang="en-US" altLang="zh-TW" dirty="0" err="1">
-                <a:hlinkClick r:id="rId5"/>
-              </a:rPr>
-              <a:t>SearXNG</a:t>
-            </a:r>
-            <a:r>
-              <a:rPr lang="en-US" altLang="zh-TW" dirty="0">
-                <a:hlinkClick r:id="rId5"/>
-              </a:rPr>
-              <a:t> installation</a:t>
+              <a:rPr lang="zh-TW" altLang="zh-TW" dirty="0"/>
+              <a:t>KV cache precision affects agent performance; FP16 performs better than Q8_0 or Q4_0 quantization.</a:t>
+            </a:r>
+            <a:endParaRPr lang="en-US" altLang="zh-TW" dirty="0"/>
+          </a:p>
+          <a:p>
+            <a:r>
+              <a:rPr lang="zh-TW" altLang="zh-TW" dirty="0"/>
+              <a:t>MTP models generate faster than non-MTP models. However, they only support one request at a time, making them suitable for single-user LLM scenarios.</a:t>
             </a:r>
             <a:endParaRPr lang="zh-TW" altLang="en-US" dirty="0"/>
           </a:p>
@@ -5658,7 +5594,7 @@
           <p:cNvPr id="4" name="投影片編號版面配置區 3">
             <a:extLst>
               <a:ext uri="{FF2B5EF4-FFF2-40B4-BE49-F238E27FC236}">
-                <a16:creationId xmlns:a16="http://schemas.microsoft.com/office/drawing/2014/main" id="{58300669-D3DD-446F-7E72-DE8EC0A725CD}"/>
+                <a16:creationId xmlns:a16="http://schemas.microsoft.com/office/drawing/2014/main" id="{9A2A52A4-F420-E361-C51F-6FA0EFDE2261}"/>
               </a:ext>
             </a:extLst>
           </p:cNvPr>
@@ -5677,6 +5613,206 @@
             <a:fld id="{FBD6B3D2-A88D-4947-AE11-6DEE5A0E6548}" type="slidenum">
               <a:rPr lang="zh-TW" altLang="en-US" smtClean="0"/>
               <a:t>12</a:t>
+            </a:fld>
+            <a:endParaRPr lang="zh-TW" altLang="en-US"/>
+          </a:p>
+        </p:txBody>
+      </p:sp>
+    </p:spTree>
+    <p:extLst>
+      <p:ext uri="{BB962C8B-B14F-4D97-AF65-F5344CB8AC3E}">
+        <p14:creationId xmlns:p14="http://schemas.microsoft.com/office/powerpoint/2010/main" val="2262416250"/>
+      </p:ext>
+    </p:extLst>
+  </p:cSld>
+  <p:clrMapOvr>
+    <a:masterClrMapping/>
+  </p:clrMapOvr>
+</p:sld>
+</file>
+
+<file path=ppt/slides/slide13.xml><?xml version="1.0" encoding="utf-8"?>
+<p:sld xmlns:a="http://schemas.openxmlformats.org/drawingml/2006/main" xmlns:r="http://schemas.openxmlformats.org/officeDocument/2006/relationships" xmlns:p="http://schemas.openxmlformats.org/presentationml/2006/main">
+  <p:cSld>
+    <p:spTree>
+      <p:nvGrpSpPr>
+        <p:cNvPr id="1" name=""/>
+        <p:cNvGrpSpPr/>
+        <p:nvPr/>
+      </p:nvGrpSpPr>
+      <p:grpSpPr>
+        <a:xfrm>
+          <a:off x="0" y="0"/>
+          <a:ext cx="0" cy="0"/>
+          <a:chOff x="0" y="0"/>
+          <a:chExt cx="0" cy="0"/>
+        </a:xfrm>
+      </p:grpSpPr>
+      <p:sp>
+        <p:nvSpPr>
+          <p:cNvPr id="2" name="標題 1">
+            <a:extLst>
+              <a:ext uri="{FF2B5EF4-FFF2-40B4-BE49-F238E27FC236}">
+                <a16:creationId xmlns:a16="http://schemas.microsoft.com/office/drawing/2014/main" id="{4C34B8E5-381F-01C4-A515-09D17BCF4C67}"/>
+              </a:ext>
+            </a:extLst>
+          </p:cNvPr>
+          <p:cNvSpPr>
+            <a:spLocks noGrp="1"/>
+          </p:cNvSpPr>
+          <p:nvPr>
+            <p:ph type="title"/>
+          </p:nvPr>
+        </p:nvSpPr>
+        <p:spPr/>
+        <p:txBody>
+          <a:bodyPr/>
+          <a:lstStyle/>
+          <a:p>
+            <a:r>
+              <a:rPr lang="en-US" altLang="zh-TW" dirty="0"/>
+              <a:t>References</a:t>
+            </a:r>
+            <a:endParaRPr lang="zh-TW" altLang="en-US" dirty="0"/>
+          </a:p>
+        </p:txBody>
+      </p:sp>
+      <p:sp>
+        <p:nvSpPr>
+          <p:cNvPr id="3" name="內容版面配置區 2">
+            <a:extLst>
+              <a:ext uri="{FF2B5EF4-FFF2-40B4-BE49-F238E27FC236}">
+                <a16:creationId xmlns:a16="http://schemas.microsoft.com/office/drawing/2014/main" id="{F3A073B2-D884-07D0-EC56-507C2A95E3A5}"/>
+              </a:ext>
+            </a:extLst>
+          </p:cNvPr>
+          <p:cNvSpPr>
+            <a:spLocks noGrp="1"/>
+          </p:cNvSpPr>
+          <p:nvPr>
+            <p:ph idx="1"/>
+          </p:nvPr>
+        </p:nvSpPr>
+        <p:spPr/>
+        <p:txBody>
+          <a:bodyPr/>
+          <a:lstStyle/>
+          <a:p>
+            <a:r>
+              <a:rPr lang="en-US" altLang="zh-TW" dirty="0">
+                <a:hlinkClick r:id="rId2"/>
+              </a:rPr>
+              <a:t>OpenClaw </a:t>
+            </a:r>
+            <a:r>
+              <a:rPr lang="en-US" altLang="zh-TW" dirty="0" err="1">
+                <a:hlinkClick r:id="rId2"/>
+              </a:rPr>
+              <a:t>github</a:t>
+            </a:r>
+            <a:r>
+              <a:rPr lang="en-US" altLang="zh-TW" dirty="0">
+                <a:hlinkClick r:id="rId2"/>
+              </a:rPr>
+              <a:t> repo</a:t>
+            </a:r>
+            <a:endParaRPr lang="en-US" altLang="zh-TW" dirty="0"/>
+          </a:p>
+          <a:p>
+            <a:r>
+              <a:rPr lang="en-US" altLang="zh-TW" u="sng" dirty="0" err="1">
+                <a:hlinkClick r:id="rId3"/>
+              </a:rPr>
+              <a:t>huggingface</a:t>
+            </a:r>
+            <a:r>
+              <a:rPr lang="en-US" altLang="zh-TW" u="sng" dirty="0">
+                <a:hlinkClick r:id="rId3"/>
+              </a:rPr>
+              <a:t> </a:t>
+            </a:r>
+            <a:r>
+              <a:rPr lang="en-US" altLang="zh-TW" u="sng" dirty="0" err="1">
+                <a:hlinkClick r:id="rId3"/>
+              </a:rPr>
+              <a:t>unsloth</a:t>
+            </a:r>
+            <a:r>
+              <a:rPr lang="en-US" altLang="zh-TW" u="sng" dirty="0">
+                <a:hlinkClick r:id="rId3"/>
+              </a:rPr>
+              <a:t>/gemma-4-E2B-it-GGUF</a:t>
+            </a:r>
+            <a:endParaRPr lang="zh-TW" altLang="zh-TW" dirty="0"/>
+          </a:p>
+          <a:p>
+            <a:r>
+              <a:rPr lang="en-US" altLang="zh-TW" u="sng" dirty="0" err="1">
+                <a:hlinkClick r:id="rId4"/>
+              </a:rPr>
+              <a:t>huggingface</a:t>
+            </a:r>
+            <a:r>
+              <a:rPr lang="en-US" altLang="zh-TW" u="sng" dirty="0">
+                <a:hlinkClick r:id="rId4"/>
+              </a:rPr>
+              <a:t> </a:t>
+            </a:r>
+            <a:r>
+              <a:rPr lang="en-US" altLang="zh-TW" u="sng" dirty="0" err="1">
+                <a:hlinkClick r:id="rId4"/>
+              </a:rPr>
+              <a:t>unsloth</a:t>
+            </a:r>
+            <a:r>
+              <a:rPr lang="en-US" altLang="zh-TW" u="sng" dirty="0">
+                <a:hlinkClick r:id="rId4"/>
+              </a:rPr>
+              <a:t>/gemma-4-E2B-it-GGUF MTP</a:t>
+            </a:r>
+            <a:endParaRPr lang="zh-TW" altLang="zh-TW" dirty="0"/>
+          </a:p>
+          <a:p>
+            <a:r>
+              <a:rPr lang="en-US" altLang="zh-TW" dirty="0" err="1">
+                <a:hlinkClick r:id="rId5"/>
+              </a:rPr>
+              <a:t>SearXNG</a:t>
+            </a:r>
+            <a:r>
+              <a:rPr lang="en-US" altLang="zh-TW" dirty="0">
+                <a:hlinkClick r:id="rId5"/>
+              </a:rPr>
+              <a:t> installation</a:t>
+            </a:r>
+            <a:endParaRPr lang="zh-TW" altLang="en-US" dirty="0"/>
+          </a:p>
+        </p:txBody>
+      </p:sp>
+      <p:sp>
+        <p:nvSpPr>
+          <p:cNvPr id="4" name="投影片編號版面配置區 3">
+            <a:extLst>
+              <a:ext uri="{FF2B5EF4-FFF2-40B4-BE49-F238E27FC236}">
+                <a16:creationId xmlns:a16="http://schemas.microsoft.com/office/drawing/2014/main" id="{58300669-D3DD-446F-7E72-DE8EC0A725CD}"/>
+              </a:ext>
+            </a:extLst>
+          </p:cNvPr>
+          <p:cNvSpPr>
+            <a:spLocks noGrp="1"/>
+          </p:cNvSpPr>
+          <p:nvPr>
+            <p:ph type="sldNum" sz="quarter" idx="12"/>
+          </p:nvPr>
+        </p:nvSpPr>
+        <p:spPr/>
+        <p:txBody>
+          <a:bodyPr/>
+          <a:lstStyle/>
+          <a:p>
+            <a:fld id="{FBD6B3D2-A88D-4947-AE11-6DEE5A0E6548}" type="slidenum">
+              <a:rPr lang="zh-TW" altLang="en-US" smtClean="0"/>
+              <a:t>13</a:t>
             </a:fld>
             <a:endParaRPr lang="zh-TW" altLang="en-US"/>
           </a:p>
@@ -6599,7 +6735,7 @@
             </a:pPr>
             <a:r>
               <a:rPr lang="en-US" altLang="zh-TW" dirty="0"/>
-              <a:t>Ideal: LLM -&gt; web search -&gt; titles and URLs -&gt; web fetch specific URL -&gt; response</a:t>
+              <a:t>Ideal: user request -&gt; Agent -&gt; web search -&gt; titles and URLs -&gt; web fetch specific URL -&gt; response</a:t>
             </a:r>
           </a:p>
           <a:p>
@@ -6608,7 +6744,7 @@
             </a:pPr>
             <a:r>
               <a:rPr lang="en-US" altLang="zh-TW" dirty="0"/>
-              <a:t>Truth: LLM -&gt; web search -&gt; response</a:t>
+              <a:t>Truth: user request -&gt; Agent -&gt; web search -&gt; response</a:t>
             </a:r>
           </a:p>
           <a:p>
@@ -6623,7 +6759,27 @@
             </a:pPr>
             <a:r>
               <a:rPr lang="zh-TW" altLang="zh-TW" dirty="0"/>
-              <a:t>When the LLM falls short, better tools matter more.</a:t>
+              <a:t>When the </a:t>
+            </a:r>
+            <a:r>
+              <a:rPr lang="en-US" altLang="zh-TW" dirty="0"/>
+              <a:t>Agent(</a:t>
+            </a:r>
+            <a:r>
+              <a:rPr lang="zh-TW" altLang="zh-TW" dirty="0"/>
+              <a:t>LLM</a:t>
+            </a:r>
+            <a:r>
+              <a:rPr lang="en-US" altLang="zh-TW"/>
+              <a:t>)</a:t>
+            </a:r>
+            <a:r>
+              <a:rPr lang="zh-TW" altLang="zh-TW"/>
+              <a:t> </a:t>
+            </a:r>
+            <a:r>
+              <a:rPr lang="zh-TW" altLang="zh-TW" dirty="0"/>
+              <a:t>falls short, better tools matter more.</a:t>
             </a:r>
             <a:endParaRPr lang="en-US" altLang="zh-TW" dirty="0"/>
           </a:p>
